--- a/classes/parte-3-hacking-etico-y-pentesting-metodologia/081-ataques-a-credenciales-fuerza-bruta-y-password-spraying/clase-081-presentacion.pptx
+++ b/classes/parte-3-hacking-etico-y-pentesting-metodologia/081-ataques-a-credenciales-fuerza-bruta-y-password-spraying/clase-081-presentacion.pptx
@@ -17,6 +17,9 @@
     <p:sldId id="265" r:id="rId16"/>
     <p:sldId id="266" r:id="rId17"/>
     <p:sldId id="267" r:id="rId18"/>
+    <p:sldId id="268" r:id="rId19"/>
+    <p:sldId id="269" r:id="rId20"/>
+    <p:sldId id="270" r:id="rId21"/>
   </p:sldIdLst>
   <p:sldSz cx="9144000" cy="6858000" type="screen4x3"/>
   <p:notesSz cx="6858000" cy="9144000"/>
@@ -3198,7 +3201,7 @@
                   <a:srgbClr val="0B3D2E"/>
                 </a:solidFill>
               </a:rPr>
-              <a:t>⚠️ Errores comunes</a:t>
+              <a:t>✍️ Ejercicios</a:t>
             </a:r>
           </a:p>
         </p:txBody>
@@ -3236,67 +3239,82 @@
                   <a:srgbClr val="22282E"/>
                 </a:solidFill>
               </a:rPr>
-              <a:t>•  Cuentas bloqueadas masivamente — Ataste demasiados intentos; usa spraying con cadencia</a:t>
-            </a:r>
-          </a:p>
-          <a:p>
-            <a:pPr>
-              <a:spcAft>
-                <a:spcPts val="600"/>
-              </a:spcAft>
-            </a:pPr>
-            <a:r>
-              <a:rPr sz="1500">
-                <a:solidFill>
-                  <a:srgbClr val="22282E"/>
-                </a:solidFill>
-              </a:rPr>
-              <a:t>•  Hydra "child died" — Demasiados hilos (-t) para el servicio; reduce a 1-4</a:t>
-            </a:r>
-          </a:p>
-          <a:p>
-            <a:pPr>
-              <a:spcAft>
-                <a:spcPts val="600"/>
-              </a:spcAft>
-            </a:pPr>
-            <a:r>
-              <a:rPr sz="1500">
-                <a:solidFill>
-                  <a:srgbClr val="22282E"/>
-                </a:solidFill>
-              </a:rPr>
-              <a:t>•  http-post-form nunca acierta — Cadena de fallo (Invalid) mal elegida; inspecciona la respuesta real</a:t>
-            </a:r>
-          </a:p>
-          <a:p>
-            <a:pPr>
-              <a:spcAft>
-                <a:spcPts val="600"/>
-              </a:spcAft>
-            </a:pPr>
-            <a:r>
-              <a:rPr sz="1500">
-                <a:solidFill>
-                  <a:srgbClr val="22282E"/>
-                </a:solidFill>
-              </a:rPr>
-              <a:t>•  CrackMapExec sin éxitos — Contraseña no contextual; ajusta a patrones de la organización</a:t>
-            </a:r>
-          </a:p>
-          <a:p>
-            <a:pPr>
-              <a:spcAft>
-                <a:spcPts val="600"/>
-              </a:spcAft>
-            </a:pPr>
-            <a:r>
-              <a:rPr sz="1500">
-                <a:solidFill>
-                  <a:srgbClr val="22282E"/>
-                </a:solidFill>
-              </a:rPr>
-              <a:t>•  Bloqueado por MFA — La contraseña es correcta pero hay 2FA; documenta como control efectivo</a:t>
+              <a:t>•  Explica por qué el spraying evita bloqueos que la fuerza bruta provoca.</a:t>
+            </a:r>
+          </a:p>
+          <a:p>
+            <a:pPr>
+              <a:spcAft>
+                <a:spcPts val="600"/>
+              </a:spcAft>
+            </a:pPr>
+            <a:r>
+              <a:rPr sz="1500">
+                <a:solidFill>
+                  <a:srgbClr val="22282E"/>
+                </a:solidFill>
+              </a:rPr>
+              <a:t>•  Diseña una lista de 10 contraseñas contextuales para una empresa ficticia.</a:t>
+            </a:r>
+          </a:p>
+          <a:p>
+            <a:pPr>
+              <a:spcAft>
+                <a:spcPts val="600"/>
+              </a:spcAft>
+            </a:pPr>
+            <a:r>
+              <a:rPr sz="1500">
+                <a:solidFill>
+                  <a:srgbClr val="22282E"/>
+                </a:solidFill>
+              </a:rPr>
+              <a:t>•  Calcula una cadencia de spraying segura dada una política de 5 fallos por 15 minutos.</a:t>
+            </a:r>
+          </a:p>
+          <a:p>
+            <a:pPr>
+              <a:spcAft>
+                <a:spcPts val="600"/>
+              </a:spcAft>
+            </a:pPr>
+            <a:r>
+              <a:rPr sz="1500">
+                <a:solidFill>
+                  <a:srgbClr val="22282E"/>
+                </a:solidFill>
+              </a:rPr>
+              <a:t>•  Ejecuta un stuffing con un par filtrado (de laboratorio) y explica el riesgo.</a:t>
+            </a:r>
+          </a:p>
+          <a:p>
+            <a:pPr>
+              <a:spcAft>
+                <a:spcPts val="600"/>
+              </a:spcAft>
+            </a:pPr>
+            <a:r>
+              <a:rPr sz="1500">
+                <a:solidFill>
+                  <a:srgbClr val="22282E"/>
+                </a:solidFill>
+              </a:rPr>
+              <a:t>•  Compara Hydra y CrackMapExec para spraying en AD.</a:t>
+            </a:r>
+          </a:p>
+          <a:p>
+            <a:pPr>
+              <a:spcAft>
+                <a:spcPts val="600"/>
+              </a:spcAft>
+            </a:pPr>
+            <a:r>
+              <a:rPr sz="1500">
+                <a:solidFill>
+                  <a:srgbClr val="22282E"/>
+                </a:solidFill>
+              </a:rPr>
+              <a:t>•  Enumera tres controles que hacen inviable el spraying.</a:t>
             </a:r>
           </a:p>
         </p:txBody>
@@ -3347,7 +3365,7 @@
                   <a:srgbClr val="0B3D2E"/>
                 </a:solidFill>
               </a:rPr>
-              <a:t>❓ Preguntas frecuentes</a:t>
+              <a:t>📝 Reto verificable</a:t>
             </a:r>
           </a:p>
         </p:txBody>
@@ -3385,97 +3403,22 @@
                   <a:srgbClr val="22282E"/>
                 </a:solidFill>
               </a:rPr>
-              <a:t>•  ❓ ¿Por qué el spraying es tan efectivo?</a:t>
-            </a:r>
-          </a:p>
-          <a:p>
-            <a:pPr>
-              <a:spcAft>
-                <a:spcPts val="600"/>
-              </a:spcAft>
-            </a:pPr>
-            <a:r>
-              <a:rPr sz="1500">
-                <a:solidFill>
-                  <a:srgbClr val="22282E"/>
-                </a:solidFill>
-              </a:rPr>
-              <a:t>•  Porque en cualquier organización grande, con una sola contraseña muy común (Empresa2024!) es probable que al menos un usuario la use. Al probar una contraseña contra todos, evitas bloqueos y consigues acceso.</a:t>
-            </a:r>
-          </a:p>
-          <a:p>
-            <a:pPr>
-              <a:spcAft>
-                <a:spcPts val="600"/>
-              </a:spcAft>
-            </a:pPr>
-            <a:r>
-              <a:rPr sz="1500">
-                <a:solidFill>
-                  <a:srgbClr val="22282E"/>
-                </a:solidFill>
-              </a:rPr>
-              <a:t>•  ❓ ¿Cómo sé cuántos intentos son seguros?</a:t>
-            </a:r>
-          </a:p>
-          <a:p>
-            <a:pPr>
-              <a:spcAft>
-                <a:spcPts val="600"/>
-              </a:spcAft>
-            </a:pPr>
-            <a:r>
-              <a:rPr sz="1500">
-                <a:solidFill>
-                  <a:srgbClr val="22282E"/>
-                </a:solidFill>
-              </a:rPr>
-              <a:t>•  Necesitas conocer (o estimar) la política de lockout: umbral de fallos y ventana de observación. Mantente por debajo del umbral por cuenta y espaciando en el tiempo.</a:t>
-            </a:r>
-          </a:p>
-          <a:p>
-            <a:pPr>
-              <a:spcAft>
-                <a:spcPts val="600"/>
-              </a:spcAft>
-            </a:pPr>
-            <a:r>
-              <a:rPr sz="1500">
-                <a:solidFill>
-                  <a:srgbClr val="22282E"/>
-                </a:solidFill>
-              </a:rPr>
-              <a:t>•  ❓ ¿MFA detiene estos ataques?</a:t>
-            </a:r>
-          </a:p>
-          <a:p>
-            <a:pPr>
-              <a:spcAft>
-                <a:spcPts val="600"/>
-              </a:spcAft>
-            </a:pPr>
-            <a:r>
-              <a:rPr sz="1500">
-                <a:solidFill>
-                  <a:srgbClr val="22282E"/>
-                </a:solidFill>
-              </a:rPr>
-              <a:t>•  En gran medida sí: aunque adivines la contraseña, el segundo factor bloquea el acceso. Por eso MFA es la recomendación número uno en el informe.</a:t>
-            </a:r>
-          </a:p>
-          <a:p>
-            <a:pPr>
-              <a:spcAft>
-                <a:spcPts val="600"/>
-              </a:spcAft>
-            </a:pPr>
-            <a:r>
-              <a:rPr sz="1500">
-                <a:solidFill>
-                  <a:srgbClr val="22282E"/>
-                </a:solidFill>
-              </a:rPr>
-              <a:t>•  ❓ ¿Credential stuffing es legal en un pentest?</a:t>
+              <a:t>•  Realiza un password spraying controlado en tu laboratorio que comprometa al menos una cuenta sin bloquear ninguna.</a:t>
+            </a:r>
+          </a:p>
+          <a:p>
+            <a:pPr>
+              <a:spcAft>
+                <a:spcPts val="600"/>
+              </a:spcAft>
+            </a:pPr>
+            <a:r>
+              <a:rPr sz="1500">
+                <a:solidFill>
+                  <a:srgbClr val="22282E"/>
+                </a:solidFill>
+              </a:rPr>
+              <a:t>•  Criterio de aceptación: documentas la lista de usuarios, la(s) contraseña(s) probada(s), la cadencia respetando el lockout, al menos una credencial válida encontrada y verificada, y cero cuentas…</a:t>
             </a:r>
           </a:p>
         </p:txBody>
@@ -3526,7 +3469,7 @@
                   <a:srgbClr val="0B3D2E"/>
                 </a:solidFill>
               </a:rPr>
-              <a:t>🔗 Referencias</a:t>
+              <a:t>⚠️ Errores comunes</a:t>
             </a:r>
           </a:p>
         </p:txBody>
@@ -3564,6 +3507,334 @@
                   <a:srgbClr val="22282E"/>
                 </a:solidFill>
               </a:rPr>
+              <a:t>•  Cuentas bloqueadas masivamente — Ataste demasiados intentos; usa spraying con cadencia</a:t>
+            </a:r>
+          </a:p>
+          <a:p>
+            <a:pPr>
+              <a:spcAft>
+                <a:spcPts val="600"/>
+              </a:spcAft>
+            </a:pPr>
+            <a:r>
+              <a:rPr sz="1500">
+                <a:solidFill>
+                  <a:srgbClr val="22282E"/>
+                </a:solidFill>
+              </a:rPr>
+              <a:t>•  Hydra "child died" — Demasiados hilos (-t) para el servicio; reduce a 1-4</a:t>
+            </a:r>
+          </a:p>
+          <a:p>
+            <a:pPr>
+              <a:spcAft>
+                <a:spcPts val="600"/>
+              </a:spcAft>
+            </a:pPr>
+            <a:r>
+              <a:rPr sz="1500">
+                <a:solidFill>
+                  <a:srgbClr val="22282E"/>
+                </a:solidFill>
+              </a:rPr>
+              <a:t>•  http-post-form nunca acierta — Cadena de fallo (Invalid) mal elegida; inspecciona la respuesta real</a:t>
+            </a:r>
+          </a:p>
+          <a:p>
+            <a:pPr>
+              <a:spcAft>
+                <a:spcPts val="600"/>
+              </a:spcAft>
+            </a:pPr>
+            <a:r>
+              <a:rPr sz="1500">
+                <a:solidFill>
+                  <a:srgbClr val="22282E"/>
+                </a:solidFill>
+              </a:rPr>
+              <a:t>•  CrackMapExec sin éxitos — Contraseña no contextual; ajusta a patrones de la organización</a:t>
+            </a:r>
+          </a:p>
+          <a:p>
+            <a:pPr>
+              <a:spcAft>
+                <a:spcPts val="600"/>
+              </a:spcAft>
+            </a:pPr>
+            <a:r>
+              <a:rPr sz="1500">
+                <a:solidFill>
+                  <a:srgbClr val="22282E"/>
+                </a:solidFill>
+              </a:rPr>
+              <a:t>•  Bloqueado por MFA — La contraseña es correcta pero hay 2FA; documenta como control efectivo</a:t>
+            </a:r>
+          </a:p>
+        </p:txBody>
+      </p:sp>
+    </p:spTree>
+  </p:cSld>
+  <p:clrMapOvr>
+    <a:masterClrMapping/>
+  </p:clrMapOvr>
+</p:sld>
+</file>
+
+<file path=ppt/slides/slide13.xml><?xml version="1.0" encoding="utf-8"?>
+<p:sld xmlns:a="http://schemas.openxmlformats.org/drawingml/2006/main" xmlns:p="http://schemas.openxmlformats.org/presentationml/2006/main" xmlns:r="http://schemas.openxmlformats.org/officeDocument/2006/relationships">
+  <p:cSld>
+    <p:spTree>
+      <p:nvGrpSpPr>
+        <p:cNvPr id="1" name=""/>
+        <p:cNvGrpSpPr/>
+        <p:nvPr/>
+      </p:nvGrpSpPr>
+      <p:grpSpPr/>
+      <p:sp>
+        <p:nvSpPr>
+          <p:cNvPr id="2" name="TextBox 1"/>
+          <p:cNvSpPr txBox="1"/>
+          <p:nvPr/>
+        </p:nvSpPr>
+        <p:spPr>
+          <a:xfrm>
+            <a:off x="457200" y="320040"/>
+            <a:ext cx="8229600" cy="822960"/>
+          </a:xfrm>
+          <a:prstGeom prst="rect">
+            <a:avLst/>
+          </a:prstGeom>
+          <a:noFill/>
+        </p:spPr>
+        <p:txBody>
+          <a:bodyPr wrap="square">
+            <a:spAutoFit/>
+          </a:bodyPr>
+          <a:lstStyle/>
+          <a:p>
+            <a:r>
+              <a:rPr sz="2600" b="1">
+                <a:solidFill>
+                  <a:srgbClr val="0B3D2E"/>
+                </a:solidFill>
+              </a:rPr>
+              <a:t>❓ Preguntas frecuentes</a:t>
+            </a:r>
+          </a:p>
+        </p:txBody>
+      </p:sp>
+      <p:sp>
+        <p:nvSpPr>
+          <p:cNvPr id="3" name="TextBox 2"/>
+          <p:cNvSpPr txBox="1"/>
+          <p:nvPr/>
+        </p:nvSpPr>
+        <p:spPr>
+          <a:xfrm>
+            <a:off x="457200" y="1280160"/>
+            <a:ext cx="8229600" cy="4937760"/>
+          </a:xfrm>
+          <a:prstGeom prst="rect">
+            <a:avLst/>
+          </a:prstGeom>
+          <a:noFill/>
+        </p:spPr>
+        <p:txBody>
+          <a:bodyPr wrap="square">
+            <a:spAutoFit/>
+          </a:bodyPr>
+          <a:lstStyle/>
+          <a:p>
+            <a:pPr>
+              <a:spcAft>
+                <a:spcPts val="600"/>
+              </a:spcAft>
+            </a:pPr>
+            <a:r>
+              <a:rPr sz="1500">
+                <a:solidFill>
+                  <a:srgbClr val="22282E"/>
+                </a:solidFill>
+              </a:rPr>
+              <a:t>•  ❓ ¿Por qué el spraying es tan efectivo?</a:t>
+            </a:r>
+          </a:p>
+          <a:p>
+            <a:pPr>
+              <a:spcAft>
+                <a:spcPts val="600"/>
+              </a:spcAft>
+            </a:pPr>
+            <a:r>
+              <a:rPr sz="1500">
+                <a:solidFill>
+                  <a:srgbClr val="22282E"/>
+                </a:solidFill>
+              </a:rPr>
+              <a:t>•  Porque en cualquier organización grande, con una sola contraseña muy común (Empresa2024!) es probable que al menos un usuario la use. Al probar una contraseña contra todos, evitas bloqueos y…</a:t>
+            </a:r>
+          </a:p>
+          <a:p>
+            <a:pPr>
+              <a:spcAft>
+                <a:spcPts val="600"/>
+              </a:spcAft>
+            </a:pPr>
+            <a:r>
+              <a:rPr sz="1500">
+                <a:solidFill>
+                  <a:srgbClr val="22282E"/>
+                </a:solidFill>
+              </a:rPr>
+              <a:t>•  ❓ ¿Cómo sé cuántos intentos son seguros?</a:t>
+            </a:r>
+          </a:p>
+          <a:p>
+            <a:pPr>
+              <a:spcAft>
+                <a:spcPts val="600"/>
+              </a:spcAft>
+            </a:pPr>
+            <a:r>
+              <a:rPr sz="1500">
+                <a:solidFill>
+                  <a:srgbClr val="22282E"/>
+                </a:solidFill>
+              </a:rPr>
+              <a:t>•  Necesitas conocer (o estimar) la política de lockout: umbral de fallos y ventana de observación. Mantente por debajo del umbral por cuenta y espaciando en el tiempo.</a:t>
+            </a:r>
+          </a:p>
+          <a:p>
+            <a:pPr>
+              <a:spcAft>
+                <a:spcPts val="600"/>
+              </a:spcAft>
+            </a:pPr>
+            <a:r>
+              <a:rPr sz="1500">
+                <a:solidFill>
+                  <a:srgbClr val="22282E"/>
+                </a:solidFill>
+              </a:rPr>
+              <a:t>•  ❓ ¿MFA detiene estos ataques?</a:t>
+            </a:r>
+          </a:p>
+          <a:p>
+            <a:pPr>
+              <a:spcAft>
+                <a:spcPts val="600"/>
+              </a:spcAft>
+            </a:pPr>
+            <a:r>
+              <a:rPr sz="1500">
+                <a:solidFill>
+                  <a:srgbClr val="22282E"/>
+                </a:solidFill>
+              </a:rPr>
+              <a:t>•  En gran medida sí: aunque adivines la contraseña, el segundo factor bloquea el acceso. Por eso MFA es la recomendación número uno en el informe.</a:t>
+            </a:r>
+          </a:p>
+          <a:p>
+            <a:pPr>
+              <a:spcAft>
+                <a:spcPts val="600"/>
+              </a:spcAft>
+            </a:pPr>
+            <a:r>
+              <a:rPr sz="1500">
+                <a:solidFill>
+                  <a:srgbClr val="22282E"/>
+                </a:solidFill>
+              </a:rPr>
+              <a:t>•  ❓ ¿Credential stuffing es legal en un pentest?</a:t>
+            </a:r>
+          </a:p>
+        </p:txBody>
+      </p:sp>
+    </p:spTree>
+  </p:cSld>
+  <p:clrMapOvr>
+    <a:masterClrMapping/>
+  </p:clrMapOvr>
+</p:sld>
+</file>
+
+<file path=ppt/slides/slide14.xml><?xml version="1.0" encoding="utf-8"?>
+<p:sld xmlns:a="http://schemas.openxmlformats.org/drawingml/2006/main" xmlns:p="http://schemas.openxmlformats.org/presentationml/2006/main" xmlns:r="http://schemas.openxmlformats.org/officeDocument/2006/relationships">
+  <p:cSld>
+    <p:spTree>
+      <p:nvGrpSpPr>
+        <p:cNvPr id="1" name=""/>
+        <p:cNvGrpSpPr/>
+        <p:nvPr/>
+      </p:nvGrpSpPr>
+      <p:grpSpPr/>
+      <p:sp>
+        <p:nvSpPr>
+          <p:cNvPr id="2" name="TextBox 1"/>
+          <p:cNvSpPr txBox="1"/>
+          <p:nvPr/>
+        </p:nvSpPr>
+        <p:spPr>
+          <a:xfrm>
+            <a:off x="457200" y="320040"/>
+            <a:ext cx="8229600" cy="822960"/>
+          </a:xfrm>
+          <a:prstGeom prst="rect">
+            <a:avLst/>
+          </a:prstGeom>
+          <a:noFill/>
+        </p:spPr>
+        <p:txBody>
+          <a:bodyPr wrap="square">
+            <a:spAutoFit/>
+          </a:bodyPr>
+          <a:lstStyle/>
+          <a:p>
+            <a:r>
+              <a:rPr sz="2600" b="1">
+                <a:solidFill>
+                  <a:srgbClr val="0B3D2E"/>
+                </a:solidFill>
+              </a:rPr>
+              <a:t>🔗 Referencias</a:t>
+            </a:r>
+          </a:p>
+        </p:txBody>
+      </p:sp>
+      <p:sp>
+        <p:nvSpPr>
+          <p:cNvPr id="3" name="TextBox 2"/>
+          <p:cNvSpPr txBox="1"/>
+          <p:nvPr/>
+        </p:nvSpPr>
+        <p:spPr>
+          <a:xfrm>
+            <a:off x="457200" y="1280160"/>
+            <a:ext cx="8229600" cy="4937760"/>
+          </a:xfrm>
+          <a:prstGeom prst="rect">
+            <a:avLst/>
+          </a:prstGeom>
+          <a:noFill/>
+        </p:spPr>
+        <p:txBody>
+          <a:bodyPr wrap="square">
+            <a:spAutoFit/>
+          </a:bodyPr>
+          <a:lstStyle/>
+          <a:p>
+            <a:pPr>
+              <a:spcAft>
+                <a:spcPts val="600"/>
+              </a:spcAft>
+            </a:pPr>
+            <a:r>
+              <a:rPr sz="1500">
+                <a:solidFill>
+                  <a:srgbClr val="22282E"/>
+                </a:solidFill>
+              </a:rPr>
               <a:t>•  Kim, P. The Hacker Playbook 3 (2018).</a:t>
             </a:r>
           </a:p>
@@ -3614,6 +3885,81 @@
           </a:p>
         </p:txBody>
       </p:sp>
+    </p:spTree>
+  </p:cSld>
+  <p:clrMapOvr>
+    <a:masterClrMapping/>
+  </p:clrMapOvr>
+</p:sld>
+</file>
+
+<file path=ppt/slides/slide15.xml><?xml version="1.0" encoding="utf-8"?>
+<p:sld xmlns:a="http://schemas.openxmlformats.org/drawingml/2006/main" xmlns:p="http://schemas.openxmlformats.org/presentationml/2006/main" xmlns:r="http://schemas.openxmlformats.org/officeDocument/2006/relationships">
+  <p:cSld>
+    <p:spTree>
+      <p:nvGrpSpPr>
+        <p:cNvPr id="1" name=""/>
+        <p:cNvGrpSpPr/>
+        <p:nvPr/>
+      </p:nvGrpSpPr>
+      <p:grpSpPr/>
+      <p:sp>
+        <p:nvSpPr>
+          <p:cNvPr id="2" name="TextBox 1"/>
+          <p:cNvSpPr txBox="1"/>
+          <p:nvPr/>
+        </p:nvSpPr>
+        <p:spPr>
+          <a:xfrm>
+            <a:off x="457200" y="274320"/>
+            <a:ext cx="8229600" cy="640080"/>
+          </a:xfrm>
+          <a:prstGeom prst="rect">
+            <a:avLst/>
+          </a:prstGeom>
+          <a:noFill/>
+        </p:spPr>
+        <p:txBody>
+          <a:bodyPr wrap="square">
+            <a:spAutoFit/>
+          </a:bodyPr>
+          <a:lstStyle/>
+          <a:p>
+            <a:r>
+              <a:rPr sz="2200" b="1">
+                <a:solidFill>
+                  <a:srgbClr val="0B3D2E"/>
+                </a:solidFill>
+              </a:rPr>
+              <a:t>Diagrama de la clase</a:t>
+            </a:r>
+          </a:p>
+        </p:txBody>
+      </p:sp>
+      <p:pic>
+        <p:nvPicPr>
+          <p:cNvPr id="3" name="Picture 2" descr="22a7e7ab11cc2d5d.png"/>
+          <p:cNvPicPr>
+            <a:picLocks noChangeAspect="1"/>
+          </p:cNvPicPr>
+          <p:nvPr/>
+        </p:nvPicPr>
+        <p:blipFill>
+          <a:blip r:embed="rId2"/>
+          <a:stretch>
+            <a:fillRect/>
+          </a:stretch>
+        </p:blipFill>
+        <p:spPr>
+          <a:xfrm>
+            <a:off x="457200" y="3337560"/>
+            <a:ext cx="8229600" cy="822960"/>
+          </a:xfrm>
+          <a:prstGeom prst="rect">
+            <a:avLst/>
+          </a:prstGeom>
+        </p:spPr>
+      </p:pic>
     </p:spTree>
   </p:cSld>
   <p:clrMapOvr>
@@ -3698,7 +4044,7 @@
                   <a:srgbClr val="22282E"/>
                 </a:solidFill>
               </a:rPr>
-              <a:t>•  Atacar la autenticación en línea de servicios reales (SSH, RDP, SMB, web, correo) diferenciando fuerza bruta, credential stuffing y password spraying, y entendiendo cómo evitar bloqueos de cuenta. El foco es la eficacia con sigilo: probar pocas contraseñas muy probables contra muchos usuarios.</a:t>
+              <a:t>•  Atacar la autenticación en línea de servicios reales (SSH, RDP, SMB, web, correo) diferenciando fuerza bruta, credential stuffing y password spraying, y entendiendo cómo evitar bloqueos de cuenta. El…</a:t>
             </a:r>
           </a:p>
         </p:txBody>
@@ -4092,7 +4438,7 @@
                   <a:srgbClr val="0B3D2E"/>
                 </a:solidFill>
               </a:rPr>
-              <a:t>📖 Definiciones y características</a:t>
+              <a:t>🧠 Explicación en profundidad</a:t>
             </a:r>
           </a:p>
         </p:txBody>
@@ -4130,82 +4476,97 @@
                   <a:srgbClr val="22282E"/>
                 </a:solidFill>
               </a:rPr>
-              <a:t>•  Fuerza bruta: muchas contraseñas contra un usuario. Característica clave: dispara bloqueos de cuenta rápidamente.</a:t>
-            </a:r>
-          </a:p>
-          <a:p>
-            <a:pPr>
-              <a:spcAft>
-                <a:spcPts val="600"/>
-              </a:spcAft>
-            </a:pPr>
-            <a:r>
-              <a:rPr sz="1500">
-                <a:solidFill>
-                  <a:srgbClr val="22282E"/>
-                </a:solidFill>
-              </a:rPr>
-              <a:t>•  Password spraying: una o pocas contraseñas contra muchos usuarios. Característica clave: evita el lockout al no acumular fallos por cuenta.</a:t>
-            </a:r>
-          </a:p>
-          <a:p>
-            <a:pPr>
-              <a:spcAft>
-                <a:spcPts val="600"/>
-              </a:spcAft>
-            </a:pPr>
-            <a:r>
-              <a:rPr sz="1500">
-                <a:solidFill>
-                  <a:srgbClr val="22282E"/>
-                </a:solidFill>
-              </a:rPr>
-              <a:t>•  Credential stuffing: reutilizar pares usuario:contraseña filtrados. Característica clave: explota la reutilización de contraseñas entre servicios.</a:t>
-            </a:r>
-          </a:p>
-          <a:p>
-            <a:pPr>
-              <a:spcAft>
-                <a:spcPts val="600"/>
-              </a:spcAft>
-            </a:pPr>
-            <a:r>
-              <a:rPr sz="1500">
-                <a:solidFill>
-                  <a:srgbClr val="22282E"/>
-                </a:solidFill>
-              </a:rPr>
-              <a:t>•  Lockout policy: umbral de fallos que bloquea una cuenta. Característica clave: define cuántos intentos y en qué ventana son seguros.</a:t>
-            </a:r>
-          </a:p>
-          <a:p>
-            <a:pPr>
-              <a:spcAft>
-                <a:spcPts val="600"/>
-              </a:spcAft>
-            </a:pPr>
-            <a:r>
-              <a:rPr sz="1500">
-                <a:solidFill>
-                  <a:srgbClr val="22282E"/>
-                </a:solidFill>
-              </a:rPr>
-              <a:t>•  Contraseña contextual: basada en la organización/temporada (Verano2024). Característica clave: alta tasa de acierto en spraying.</a:t>
-            </a:r>
-          </a:p>
-          <a:p>
-            <a:pPr>
-              <a:spcAft>
-                <a:spcPts val="600"/>
-              </a:spcAft>
-            </a:pPr>
-            <a:r>
-              <a:rPr sz="1500">
-                <a:solidFill>
-                  <a:srgbClr val="22282E"/>
-                </a:solidFill>
-              </a:rPr>
-              <a:t>•  MFA: segundo factor de autenticación. Característica clave: neutraliza la mayoría de estos ataques aunque la contraseña sea correcta.</a:t>
+              <a:t>•  Atacar credenciales en línea —contra un portal, un servicio SMB, un Kerberos— choca con una</a:t>
+            </a:r>
+          </a:p>
+          <a:p>
+            <a:pPr>
+              <a:spcAft>
+                <a:spcPts val="600"/>
+              </a:spcAft>
+            </a:pPr>
+            <a:r>
+              <a:rPr sz="1500">
+                <a:solidFill>
+                  <a:srgbClr val="22282E"/>
+                </a:solidFill>
+              </a:rPr>
+              <a:t>•  defensa sencilla y muy extendida: el bloqueo por intentos fallidos. Probar mil</a:t>
+            </a:r>
+          </a:p>
+          <a:p>
+            <a:pPr>
+              <a:spcAft>
+                <a:spcPts val="600"/>
+              </a:spcAft>
+            </a:pPr>
+            <a:r>
+              <a:rPr sz="1500">
+                <a:solidFill>
+                  <a:srgbClr val="22282E"/>
+                </a:solidFill>
+              </a:rPr>
+              <a:t>•  contraseñas contra una cuenta la bloquea a los pocos intentos, genera alertas y no</a:t>
+            </a:r>
+          </a:p>
+          <a:p>
+            <a:pPr>
+              <a:spcAft>
+                <a:spcPts val="600"/>
+              </a:spcAft>
+            </a:pPr>
+            <a:r>
+              <a:rPr sz="1500">
+                <a:solidFill>
+                  <a:srgbClr val="22282E"/>
+                </a:solidFill>
+              </a:rPr>
+              <a:t>•  consigue nada. Por eso la estrategia profesional invierte el problema, y esa inversión es el</a:t>
+            </a:r>
+          </a:p>
+          <a:p>
+            <a:pPr>
+              <a:spcAft>
+                <a:spcPts val="600"/>
+              </a:spcAft>
+            </a:pPr>
+            <a:r>
+              <a:rPr sz="1500">
+                <a:solidFill>
+                  <a:srgbClr val="22282E"/>
+                </a:solidFill>
+              </a:rPr>
+              <a:t>•  concepto central de la clase.</a:t>
+            </a:r>
+          </a:p>
+          <a:p>
+            <a:pPr>
+              <a:spcAft>
+                <a:spcPts val="600"/>
+              </a:spcAft>
+            </a:pPr>
+            <a:r>
+              <a:rPr sz="1500">
+                <a:solidFill>
+                  <a:srgbClr val="22282E"/>
+                </a:solidFill>
+              </a:rPr>
+              <a:t>•  La fuerza bruta clásica prueba muchas contraseñas contra una cuenta: rápida de</a:t>
+            </a:r>
+          </a:p>
+          <a:p>
+            <a:pPr>
+              <a:spcAft>
+                <a:spcPts val="600"/>
+              </a:spcAft>
+            </a:pPr>
+            <a:r>
+              <a:rPr sz="1500">
+                <a:solidFill>
+                  <a:srgbClr val="22282E"/>
+                </a:solidFill>
+              </a:rPr>
+              <a:t>•  bloquear, ruidosa, poco útil en línea. El password spraying hace lo contrario: prueba</a:t>
             </a:r>
           </a:p>
         </p:txBody>
@@ -4256,7 +4617,7 @@
                   <a:srgbClr val="0B3D2E"/>
                 </a:solidFill>
               </a:rPr>
-              <a:t>🧰 Herramientas y preparación</a:t>
+              <a:t>📖 Definiciones y características</a:t>
             </a:r>
           </a:p>
         </p:txBody>
@@ -4294,22 +4655,82 @@
                   <a:srgbClr val="22282E"/>
                 </a:solidFill>
               </a:rPr>
-              <a:t>•  sudo apt install -y hydra medusa crackmapexec</a:t>
-            </a:r>
-          </a:p>
-          <a:p>
-            <a:pPr>
-              <a:spcAft>
-                <a:spcPts val="600"/>
-              </a:spcAft>
-            </a:pPr>
-            <a:r>
-              <a:rPr sz="1500">
-                <a:solidFill>
-                  <a:srgbClr val="22282E"/>
-                </a:solidFill>
-              </a:rPr>
-              <a:t>•  Prepara listas: usuarios enumerados (clases 068/070) y contraseñas contextuales (nombre de empresa + año + símbolo). Objetivo: servicios de laboratorio propios (un SSH, un SMB, una web de prueba).</a:t>
+              <a:t>•  Fuerza bruta: muchas contraseñas contra un usuario. Característica clave: dispara bloqueos de cuenta rápidamente.</a:t>
+            </a:r>
+          </a:p>
+          <a:p>
+            <a:pPr>
+              <a:spcAft>
+                <a:spcPts val="600"/>
+              </a:spcAft>
+            </a:pPr>
+            <a:r>
+              <a:rPr sz="1500">
+                <a:solidFill>
+                  <a:srgbClr val="22282E"/>
+                </a:solidFill>
+              </a:rPr>
+              <a:t>•  Password spraying: una o pocas contraseñas contra muchos usuarios. Característica clave: evita el lockout al no acumular fallos por cuenta.</a:t>
+            </a:r>
+          </a:p>
+          <a:p>
+            <a:pPr>
+              <a:spcAft>
+                <a:spcPts val="600"/>
+              </a:spcAft>
+            </a:pPr>
+            <a:r>
+              <a:rPr sz="1500">
+                <a:solidFill>
+                  <a:srgbClr val="22282E"/>
+                </a:solidFill>
+              </a:rPr>
+              <a:t>•  Credential stuffing: reutilizar pares usuario:contraseña filtrados. Característica clave: explota la reutilización de contraseñas entre servicios.</a:t>
+            </a:r>
+          </a:p>
+          <a:p>
+            <a:pPr>
+              <a:spcAft>
+                <a:spcPts val="600"/>
+              </a:spcAft>
+            </a:pPr>
+            <a:r>
+              <a:rPr sz="1500">
+                <a:solidFill>
+                  <a:srgbClr val="22282E"/>
+                </a:solidFill>
+              </a:rPr>
+              <a:t>•  Lockout policy: umbral de fallos que bloquea una cuenta. Característica clave: define cuántos intentos y en qué ventana son seguros.</a:t>
+            </a:r>
+          </a:p>
+          <a:p>
+            <a:pPr>
+              <a:spcAft>
+                <a:spcPts val="600"/>
+              </a:spcAft>
+            </a:pPr>
+            <a:r>
+              <a:rPr sz="1500">
+                <a:solidFill>
+                  <a:srgbClr val="22282E"/>
+                </a:solidFill>
+              </a:rPr>
+              <a:t>•  Contraseña contextual: basada en la organización/temporada (Verano2024). Característica clave: alta tasa de acierto en spraying.</a:t>
+            </a:r>
+          </a:p>
+          <a:p>
+            <a:pPr>
+              <a:spcAft>
+                <a:spcPts val="600"/>
+              </a:spcAft>
+            </a:pPr>
+            <a:r>
+              <a:rPr sz="1500">
+                <a:solidFill>
+                  <a:srgbClr val="22282E"/>
+                </a:solidFill>
+              </a:rPr>
+              <a:t>•  MFA: segundo factor de autenticación. Característica clave: neutraliza la mayoría de estos ataques aunque la contraseña sea correcta.</a:t>
             </a:r>
           </a:p>
         </p:txBody>
@@ -4360,7 +4781,7 @@
                   <a:srgbClr val="0B3D2E"/>
                 </a:solidFill>
               </a:rPr>
-              <a:t>🧪 Laboratorio guiado</a:t>
+              <a:t>📔 Glosario</a:t>
             </a:r>
           </a:p>
         </p:txBody>
@@ -4398,97 +4819,97 @@
                   <a:srgbClr val="22282E"/>
                 </a:solidFill>
               </a:rPr>
-              <a:t>•  Fuerza bruta controlada de SSH (un usuario, lista corta):</a:t>
-            </a:r>
-          </a:p>
-          <a:p>
-            <a:pPr>
-              <a:spcAft>
-                <a:spcPts val="600"/>
-              </a:spcAft>
-            </a:pPr>
-            <a:r>
-              <a:rPr sz="1500">
-                <a:solidFill>
-                  <a:srgbClr val="22282E"/>
-                </a:solidFill>
-              </a:rPr>
-              <a:t>•  hydra -l admin -P passwords.txt ssh://192.168.56.101 -t 4 -f</a:t>
-            </a:r>
-          </a:p>
-          <a:p>
-            <a:pPr>
-              <a:spcAft>
-                <a:spcPts val="600"/>
-              </a:spcAft>
-            </a:pPr>
-            <a:r>
-              <a:rPr sz="1500">
-                <a:solidFill>
-                  <a:srgbClr val="22282E"/>
-                </a:solidFill>
-              </a:rPr>
-              <a:t>•  Password spraying en SMB con CrackMapExec (una contraseña, muchos usuarios):</a:t>
-            </a:r>
-          </a:p>
-          <a:p>
-            <a:pPr>
-              <a:spcAft>
-                <a:spcPts val="600"/>
-              </a:spcAft>
-            </a:pPr>
-            <a:r>
-              <a:rPr sz="1500">
-                <a:solidFill>
-                  <a:srgbClr val="22282E"/>
-                </a:solidFill>
-              </a:rPr>
-              <a:t>•  crackmapexec smb 192.168.56.20 -u usuarios.txt -p 'Empresa2024!' --continue-on-success</a:t>
-            </a:r>
-          </a:p>
-          <a:p>
-            <a:pPr>
-              <a:spcAft>
-                <a:spcPts val="600"/>
-              </a:spcAft>
-            </a:pPr>
-            <a:r>
-              <a:rPr sz="1500">
-                <a:solidFill>
-                  <a:srgbClr val="22282E"/>
-                </a:solidFill>
-              </a:rPr>
-              <a:t>•  Ataque a formulario web con Hydra (http-post-form de laboratorio):</a:t>
-            </a:r>
-          </a:p>
-          <a:p>
-            <a:pPr>
-              <a:spcAft>
-                <a:spcPts val="600"/>
-              </a:spcAft>
-            </a:pPr>
-            <a:r>
-              <a:rPr sz="1500">
-                <a:solidFill>
-                  <a:srgbClr val="22282E"/>
-                </a:solidFill>
-              </a:rPr>
-              <a:t>•  hydra -L usuarios.txt -p 'Primavera2024!' 192.168.56.30 http-post-form "/login:user=^USER^&amp;pass=^PASS^:Invalid"</a:t>
-            </a:r>
-          </a:p>
-          <a:p>
-            <a:pPr>
-              <a:spcAft>
-                <a:spcPts val="600"/>
-              </a:spcAft>
-            </a:pPr>
-            <a:r>
-              <a:rPr sz="1500">
-                <a:solidFill>
-                  <a:srgbClr val="22282E"/>
-                </a:solidFill>
-              </a:rPr>
-              <a:t>•  Respeta el lockout: calcula intentos seguros (p. ej. 1 intento cada 30 min si el umbral es 5/30min).</a:t>
+              <a:t>•  Término — Definición concisa</a:t>
+            </a:r>
+          </a:p>
+          <a:p>
+            <a:pPr>
+              <a:spcAft>
+                <a:spcPts val="600"/>
+              </a:spcAft>
+            </a:pPr>
+            <a:r>
+              <a:rPr sz="1500">
+                <a:solidFill>
+                  <a:srgbClr val="22282E"/>
+                </a:solidFill>
+              </a:rPr>
+              <a:t>•  Fuerza bruta en línea — Muchas contraseñas contra una cuenta; se bloquea</a:t>
+            </a:r>
+          </a:p>
+          <a:p>
+            <a:pPr>
+              <a:spcAft>
+                <a:spcPts val="600"/>
+              </a:spcAft>
+            </a:pPr>
+            <a:r>
+              <a:rPr sz="1500">
+                <a:solidFill>
+                  <a:srgbClr val="22282E"/>
+                </a:solidFill>
+              </a:rPr>
+              <a:t>•  Bloqueo de cuenta — Defensa que congela la cuenta tras N fallos</a:t>
+            </a:r>
+          </a:p>
+          <a:p>
+            <a:pPr>
+              <a:spcAft>
+                <a:spcPts val="600"/>
+              </a:spcAft>
+            </a:pPr>
+            <a:r>
+              <a:rPr sz="1500">
+                <a:solidFill>
+                  <a:srgbClr val="22282E"/>
+                </a:solidFill>
+              </a:rPr>
+              <a:t>•  Password spraying — Una contraseña común contra muchas cuentas; evade el bloqueo</a:t>
+            </a:r>
+          </a:p>
+          <a:p>
+            <a:pPr>
+              <a:spcAft>
+                <a:spcPts val="600"/>
+              </a:spcAft>
+            </a:pPr>
+            <a:r>
+              <a:rPr sz="1500">
+                <a:solidFill>
+                  <a:srgbClr val="22282E"/>
+                </a:solidFill>
+              </a:rPr>
+              <a:t>•  Credential stuffing — Reutilizar credenciales filtradas de otras brechas</a:t>
+            </a:r>
+          </a:p>
+          <a:p>
+            <a:pPr>
+              <a:spcAft>
+                <a:spcPts val="600"/>
+              </a:spcAft>
+            </a:pPr>
+            <a:r>
+              <a:rPr sz="1500">
+                <a:solidFill>
+                  <a:srgbClr val="22282E"/>
+                </a:solidFill>
+              </a:rPr>
+              <a:t>•  Contraseña contextual — Empresa2024! y similares; cumplen la política pero son obvias</a:t>
+            </a:r>
+          </a:p>
+          <a:p>
+            <a:pPr>
+              <a:spcAft>
+                <a:spcPts val="600"/>
+              </a:spcAft>
+            </a:pPr>
+            <a:r>
+              <a:rPr sz="1500">
+                <a:solidFill>
+                  <a:srgbClr val="22282E"/>
+                </a:solidFill>
+              </a:rPr>
+              <a:t>•  Política de contraseñas — Umbral de bloqueo que dicta el ritmo del spraying</a:t>
             </a:r>
           </a:p>
         </p:txBody>
@@ -4539,7 +4960,7 @@
                   <a:srgbClr val="0B3D2E"/>
                 </a:solidFill>
               </a:rPr>
-              <a:t>✍️ Ejercicios</a:t>
+              <a:t>🧰 Herramientas y preparación</a:t>
             </a:r>
           </a:p>
         </p:txBody>
@@ -4577,82 +4998,7 @@
                   <a:srgbClr val="22282E"/>
                 </a:solidFill>
               </a:rPr>
-              <a:t>•  Explica por qué el spraying evita bloqueos que la fuerza bruta provoca.</a:t>
-            </a:r>
-          </a:p>
-          <a:p>
-            <a:pPr>
-              <a:spcAft>
-                <a:spcPts val="600"/>
-              </a:spcAft>
-            </a:pPr>
-            <a:r>
-              <a:rPr sz="1500">
-                <a:solidFill>
-                  <a:srgbClr val="22282E"/>
-                </a:solidFill>
-              </a:rPr>
-              <a:t>•  Diseña una lista de 10 contraseñas contextuales para una empresa ficticia.</a:t>
-            </a:r>
-          </a:p>
-          <a:p>
-            <a:pPr>
-              <a:spcAft>
-                <a:spcPts val="600"/>
-              </a:spcAft>
-            </a:pPr>
-            <a:r>
-              <a:rPr sz="1500">
-                <a:solidFill>
-                  <a:srgbClr val="22282E"/>
-                </a:solidFill>
-              </a:rPr>
-              <a:t>•  Calcula una cadencia de spraying segura dada una política de 5 fallos por 15 minutos.</a:t>
-            </a:r>
-          </a:p>
-          <a:p>
-            <a:pPr>
-              <a:spcAft>
-                <a:spcPts val="600"/>
-              </a:spcAft>
-            </a:pPr>
-            <a:r>
-              <a:rPr sz="1500">
-                <a:solidFill>
-                  <a:srgbClr val="22282E"/>
-                </a:solidFill>
-              </a:rPr>
-              <a:t>•  Ejecuta un stuffing con un par filtrado (de laboratorio) y explica el riesgo.</a:t>
-            </a:r>
-          </a:p>
-          <a:p>
-            <a:pPr>
-              <a:spcAft>
-                <a:spcPts val="600"/>
-              </a:spcAft>
-            </a:pPr>
-            <a:r>
-              <a:rPr sz="1500">
-                <a:solidFill>
-                  <a:srgbClr val="22282E"/>
-                </a:solidFill>
-              </a:rPr>
-              <a:t>•  Compara Hydra y CrackMapExec para spraying en AD.</a:t>
-            </a:r>
-          </a:p>
-          <a:p>
-            <a:pPr>
-              <a:spcAft>
-                <a:spcPts val="600"/>
-              </a:spcAft>
-            </a:pPr>
-            <a:r>
-              <a:rPr sz="1500">
-                <a:solidFill>
-                  <a:srgbClr val="22282E"/>
-                </a:solidFill>
-              </a:rPr>
-              <a:t>•  Enumera tres controles que hacen inviable el spraying.</a:t>
+              <a:t>•  Prepara listas: usuarios enumerados (clases 068/070) y contraseñas contextuales (nombre de empresa + año + símbolo). Objetivo: servicios de laboratorio propios (un SSH, un SMB, una web de prueba).</a:t>
             </a:r>
           </a:p>
         </p:txBody>
@@ -4703,7 +5049,7 @@
                   <a:srgbClr val="0B3D2E"/>
                 </a:solidFill>
               </a:rPr>
-              <a:t>📝 Reto verificable</a:t>
+              <a:t>🧪 Laboratorio guiado</a:t>
             </a:r>
           </a:p>
         </p:txBody>
@@ -4741,22 +5087,97 @@
                   <a:srgbClr val="22282E"/>
                 </a:solidFill>
               </a:rPr>
-              <a:t>•  Realiza un password spraying controlado en tu laboratorio que comprometa al menos una cuenta sin bloquear ninguna.</a:t>
-            </a:r>
-          </a:p>
-          <a:p>
-            <a:pPr>
-              <a:spcAft>
-                <a:spcPts val="600"/>
-              </a:spcAft>
-            </a:pPr>
-            <a:r>
-              <a:rPr sz="1500">
-                <a:solidFill>
-                  <a:srgbClr val="22282E"/>
-                </a:solidFill>
-              </a:rPr>
-              <a:t>•  Criterio de aceptación: documentas la lista de usuarios, la(s) contraseña(s) probada(s), la cadencia respetando el lockout, al menos una credencial válida encontrada y verificada, y cero cuentas bloqueadas. Cierras con recomendaciones defensivas. Todo en entorno propio.</a:t>
+              <a:t>•  Fuerza bruta controlada de SSH (un usuario, lista corta):</a:t>
+            </a:r>
+          </a:p>
+          <a:p>
+            <a:pPr>
+              <a:spcAft>
+                <a:spcPts val="600"/>
+              </a:spcAft>
+            </a:pPr>
+            <a:r>
+              <a:rPr sz="1500">
+                <a:solidFill>
+                  <a:srgbClr val="22282E"/>
+                </a:solidFill>
+              </a:rPr>
+              <a:t>•  Password spraying en SMB con CrackMapExec (una contraseña, muchos usuarios):</a:t>
+            </a:r>
+          </a:p>
+          <a:p>
+            <a:pPr>
+              <a:spcAft>
+                <a:spcPts val="600"/>
+              </a:spcAft>
+            </a:pPr>
+            <a:r>
+              <a:rPr sz="1500">
+                <a:solidFill>
+                  <a:srgbClr val="22282E"/>
+                </a:solidFill>
+              </a:rPr>
+              <a:t>•  Ataque a formulario web con Hydra (http-post-form de laboratorio):</a:t>
+            </a:r>
+          </a:p>
+          <a:p>
+            <a:pPr>
+              <a:spcAft>
+                <a:spcPts val="600"/>
+              </a:spcAft>
+            </a:pPr>
+            <a:r>
+              <a:rPr sz="1500">
+                <a:solidFill>
+                  <a:srgbClr val="22282E"/>
+                </a:solidFill>
+              </a:rPr>
+              <a:t>•  Respeta el lockout: calcula intentos seguros (p. ej. 1 intento cada 30 min si el umbral es 5/30min).</a:t>
+            </a:r>
+          </a:p>
+          <a:p>
+            <a:pPr>
+              <a:spcAft>
+                <a:spcPts val="600"/>
+              </a:spcAft>
+            </a:pPr>
+            <a:r>
+              <a:rPr sz="1500">
+                <a:solidFill>
+                  <a:srgbClr val="22282E"/>
+                </a:solidFill>
+              </a:rPr>
+              <a:t>•  Marca los éxitos y valida el acceso manualmente con las credenciales obtenidas.</a:t>
+            </a:r>
+          </a:p>
+          <a:p>
+            <a:pPr>
+              <a:spcAft>
+                <a:spcPts val="600"/>
+              </a:spcAft>
+            </a:pPr>
+            <a:r>
+              <a:rPr sz="1500">
+                <a:solidFill>
+                  <a:srgbClr val="22282E"/>
+                </a:solidFill>
+              </a:rPr>
+              <a:t>•  Documenta usuarios comprometidos y la contraseña que funcionó.</a:t>
+            </a:r>
+          </a:p>
+          <a:p>
+            <a:pPr>
+              <a:spcAft>
+                <a:spcPts val="600"/>
+              </a:spcAft>
+            </a:pPr>
+            <a:r>
+              <a:rPr sz="1500">
+                <a:solidFill>
+                  <a:srgbClr val="22282E"/>
+                </a:solidFill>
+              </a:rPr>
+              <a:t>•  Redacta la recomendación defensiva (MFA + lockout + alertas).</a:t>
             </a:r>
           </a:p>
         </p:txBody>
